--- a/classes/parte-8-blue-team-deteccion-y-soc/189-analisis-de-endpoints-con-edr/clase-189-presentacion.pptx
+++ b/classes/parte-8-blue-team-deteccion-y-soc/189-analisis-de-endpoints-con-edr/clase-189-presentacion.pptx
@@ -17,6 +17,11 @@
     <p:sldId id="265" r:id="rId16"/>
     <p:sldId id="266" r:id="rId17"/>
     <p:sldId id="267" r:id="rId18"/>
+    <p:sldId id="268" r:id="rId19"/>
+    <p:sldId id="269" r:id="rId20"/>
+    <p:sldId id="270" r:id="rId21"/>
+    <p:sldId id="271" r:id="rId22"/>
+    <p:sldId id="272" r:id="rId23"/>
   </p:sldIdLst>
   <p:sldSz cx="9144000" cy="6858000" type="screen4x3"/>
   <p:notesSz cx="6858000" cy="9144000"/>
@@ -3198,7 +3203,7 @@
                   <a:srgbClr val="0B3D2E"/>
                 </a:solidFill>
               </a:rPr>
-              <a:t>⚠️ Errores comunes</a:t>
+              <a:t>🧰 Herramientas y preparación</a:t>
             </a:r>
           </a:p>
         </p:txBody>
@@ -3236,67 +3241,97 @@
                   <a:srgbClr val="22282E"/>
                 </a:solidFill>
               </a:rPr>
-              <a:t>•  Matas el proceso y pierdes evidencia — Recolecta antes de responder; aísla en vez de apagar</a:t>
-            </a:r>
-          </a:p>
-          <a:p>
-            <a:pPr>
-              <a:spcAft>
-                <a:spcPts val="600"/>
-              </a:spcAft>
-            </a:pPr>
-            <a:r>
-              <a:rPr sz="1500">
-                <a:solidFill>
-                  <a:srgbClr val="22282E"/>
-                </a:solidFill>
-              </a:rPr>
-              <a:t>•  El EDR no ve el ataque — Telemetría insuficiente o exclusiones amplias; revisa cobertura</a:t>
-            </a:r>
-          </a:p>
-          <a:p>
-            <a:pPr>
-              <a:spcAft>
-                <a:spcPts val="600"/>
-              </a:spcAft>
-            </a:pPr>
-            <a:r>
-              <a:rPr sz="1500">
-                <a:solidFill>
-                  <a:srgbClr val="22282E"/>
-                </a:solidFill>
-              </a:rPr>
-              <a:t>•  osquery devuelve vacío — Tabla equivocada o permisos; verifica con .tables y privilegios</a:t>
-            </a:r>
-          </a:p>
-          <a:p>
-            <a:pPr>
-              <a:spcAft>
-                <a:spcPts val="600"/>
-              </a:spcAft>
-            </a:pPr>
-            <a:r>
-              <a:rPr sz="1500">
-                <a:solidFill>
-                  <a:srgbClr val="22282E"/>
-                </a:solidFill>
-              </a:rPr>
-              <a:t>•  Host aislado sin poder investigar — Regla de aislamiento bloqueó también al agente; ajusta la política</a:t>
-            </a:r>
-          </a:p>
-          <a:p>
-            <a:pPr>
-              <a:spcAft>
-                <a:spcPts val="600"/>
-              </a:spcAft>
-            </a:pPr>
-            <a:r>
-              <a:rPr sz="1500">
-                <a:solidFill>
-                  <a:srgbClr val="22282E"/>
-                </a:solidFill>
-              </a:rPr>
-              <a:t>•  Alertas EDR sin contexto de linaje — Falta correlación padre-hijo; habilita registro de línea de comandos</a:t>
+              <a:t>•  En laboratorio aislado:</a:t>
+            </a:r>
+          </a:p>
+          <a:p>
+            <a:pPr>
+              <a:spcAft>
+                <a:spcPts val="600"/>
+              </a:spcAft>
+            </a:pPr>
+            <a:r>
+              <a:rPr sz="1500">
+                <a:solidFill>
+                  <a:srgbClr val="22282E"/>
+                </a:solidFill>
+              </a:rPr>
+              <a:t>•  osquery en Windows/Linux para consultas de estado.</a:t>
+            </a:r>
+          </a:p>
+          <a:p>
+            <a:pPr>
+              <a:spcAft>
+                <a:spcPts val="600"/>
+              </a:spcAft>
+            </a:pPr>
+            <a:r>
+              <a:rPr sz="1500">
+                <a:solidFill>
+                  <a:srgbClr val="22282E"/>
+                </a:solidFill>
+              </a:rPr>
+              <a:t>•  Velociraptor (servidor + cliente) para hunting y colección.</a:t>
+            </a:r>
+          </a:p>
+          <a:p>
+            <a:pPr>
+              <a:spcAft>
+                <a:spcPts val="600"/>
+              </a:spcAft>
+            </a:pPr>
+            <a:r>
+              <a:rPr sz="1500">
+                <a:solidFill>
+                  <a:srgbClr val="22282E"/>
+                </a:solidFill>
+              </a:rPr>
+              <a:t>•  Wazuh (clase 185) como capa de detección de endpoint gratuita.</a:t>
+            </a:r>
+          </a:p>
+          <a:p>
+            <a:pPr>
+              <a:spcAft>
+                <a:spcPts val="600"/>
+              </a:spcAft>
+            </a:pPr>
+            <a:r>
+              <a:rPr sz="1500">
+                <a:solidFill>
+                  <a:srgbClr val="22282E"/>
+                </a:solidFill>
+              </a:rPr>
+              <a:t>•  Sysmon como fuente de telemetría rica.</a:t>
+            </a:r>
+          </a:p>
+          <a:p>
+            <a:pPr>
+              <a:spcAft>
+                <a:spcPts val="600"/>
+              </a:spcAft>
+            </a:pPr>
+            <a:r>
+              <a:rPr sz="1500">
+                <a:solidFill>
+                  <a:srgbClr val="22282E"/>
+                </a:solidFill>
+              </a:rPr>
+              <a:t>•  Opcional: prueba de un EDR comercial en su edición de evaluación.</a:t>
+            </a:r>
+          </a:p>
+          <a:p>
+            <a:pPr>
+              <a:spcAft>
+                <a:spcPts val="600"/>
+              </a:spcAft>
+            </a:pPr>
+            <a:r>
+              <a:rPr sz="1500">
+                <a:solidFill>
+                  <a:srgbClr val="22282E"/>
+                </a:solidFill>
+              </a:rPr>
+              <a:t>•  Las acciones de respuesta (aislar, matar procesos) se practican solo sobre tus propias máquinas de laboratorio.</a:t>
             </a:r>
           </a:p>
         </p:txBody>
@@ -3347,7 +3382,7 @@
                   <a:srgbClr val="0B3D2E"/>
                 </a:solidFill>
               </a:rPr>
-              <a:t>❓ Preguntas frecuentes</a:t>
+              <a:t>🧪 Laboratorio guiado — Investiga y contén un endpoint</a:t>
             </a:r>
           </a:p>
         </p:txBody>
@@ -3385,82 +3420,97 @@
                   <a:srgbClr val="22282E"/>
                 </a:solidFill>
               </a:rPr>
-              <a:t>•  ❓ ¿EDR o antivirus?</a:t>
-            </a:r>
-          </a:p>
-          <a:p>
-            <a:pPr>
-              <a:spcAft>
-                <a:spcPts val="600"/>
-              </a:spcAft>
-            </a:pPr>
-            <a:r>
-              <a:rPr sz="1500">
-                <a:solidFill>
-                  <a:srgbClr val="22282E"/>
-                </a:solidFill>
-              </a:rPr>
-              <a:t>•  Ambos. El EPP/AV bloquea lo conocido y barato de parar; el EDR detecta comportamiento y permite responder. Se complementan; el AV suele ser una capa del EDR.</a:t>
-            </a:r>
-          </a:p>
-          <a:p>
-            <a:pPr>
-              <a:spcAft>
-                <a:spcPts val="600"/>
-              </a:spcAft>
-            </a:pPr>
-            <a:r>
-              <a:rPr sz="1500">
-                <a:solidFill>
-                  <a:srgbClr val="22282E"/>
-                </a:solidFill>
-              </a:rPr>
-              <a:t>•  ❓ ¿Puedo practicar EDR sin comprar uno?</a:t>
-            </a:r>
-          </a:p>
-          <a:p>
-            <a:pPr>
-              <a:spcAft>
-                <a:spcPts val="600"/>
-              </a:spcAft>
-            </a:pPr>
-            <a:r>
-              <a:rPr sz="1500">
-                <a:solidFill>
-                  <a:srgbClr val="22282E"/>
-                </a:solidFill>
-              </a:rPr>
-              <a:t>•  Sí. Velociraptor, osquery, Wazuh y Sysmon cubren los conceptos clave —telemetría, hunting, colección y respuesta— de forma gratuita y realista.</a:t>
-            </a:r>
-          </a:p>
-          <a:p>
-            <a:pPr>
-              <a:spcAft>
-                <a:spcPts val="600"/>
-              </a:spcAft>
-            </a:pPr>
-            <a:r>
-              <a:rPr sz="1500">
-                <a:solidFill>
-                  <a:srgbClr val="22282E"/>
-                </a:solidFill>
-              </a:rPr>
-              <a:t>•  ❓ ¿El EDR es infalible?</a:t>
-            </a:r>
-          </a:p>
-          <a:p>
-            <a:pPr>
-              <a:spcAft>
-                <a:spcPts val="600"/>
-              </a:spcAft>
-            </a:pPr>
-            <a:r>
-              <a:rPr sz="1500">
-                <a:solidFill>
-                  <a:srgbClr val="22282E"/>
-                </a:solidFill>
-              </a:rPr>
-              <a:t>•  No. Existen técnicas de evasión y tamper. Por eso el blue team combina EDR con telemetría de red, identidad y hunting: defensa en profundidad.</a:t>
+              <a:t>•  Instala la telemetría. Sysmon + agente Velociraptor + osquery en el Windows de laboratorio.</a:t>
+            </a:r>
+          </a:p>
+          <a:p>
+            <a:pPr>
+              <a:spcAft>
+                <a:spcPts val="600"/>
+              </a:spcAft>
+            </a:pPr>
+            <a:r>
+              <a:rPr sz="1500">
+                <a:solidFill>
+                  <a:srgbClr val="22282E"/>
+                </a:solidFill>
+              </a:rPr>
+              <a:t>•  Genera actividad sospechosa. En la VM, simula una cadena benigna-pero-anómala (p. ej. cmd.exe lanzando powershell -enc ... con un script inofensivo).</a:t>
+            </a:r>
+          </a:p>
+          <a:p>
+            <a:pPr>
+              <a:spcAft>
+                <a:spcPts val="600"/>
+              </a:spcAft>
+            </a:pPr>
+            <a:r>
+              <a:rPr sz="1500">
+                <a:solidFill>
+                  <a:srgbClr val="22282E"/>
+                </a:solidFill>
+              </a:rPr>
+              <a:t>•  Reconstruye el árbol. En Velociraptor, ejecuta un artefacto de listado de procesos o consulta la telemetría Sysmon para ver padre→hijo→nieto.</a:t>
+            </a:r>
+          </a:p>
+          <a:p>
+            <a:pPr>
+              <a:spcAft>
+                <a:spcPts val="600"/>
+              </a:spcAft>
+            </a:pPr>
+            <a:r>
+              <a:rPr sz="1500">
+                <a:solidFill>
+                  <a:srgbClr val="22282E"/>
+                </a:solidFill>
+              </a:rPr>
+              <a:t>•  Consulta la flota con osquery. SELECT name, path, parent FROM processes WHERE name='powershell.exe'; y correlaciona con conexiones: tabla processopensockets.</a:t>
+            </a:r>
+          </a:p>
+          <a:p>
+            <a:pPr>
+              <a:spcAft>
+                <a:spcPts val="600"/>
+              </a:spcAft>
+            </a:pPr>
+            <a:r>
+              <a:rPr sz="1500">
+                <a:solidFill>
+                  <a:srgbClr val="22282E"/>
+                </a:solidFill>
+              </a:rPr>
+              <a:t>•  Construye una línea de tiempo. Ordena por time los eventos: creación de proceso, archivo escrito, conexión de red.</a:t>
+            </a:r>
+          </a:p>
+          <a:p>
+            <a:pPr>
+              <a:spcAft>
+                <a:spcPts val="600"/>
+              </a:spcAft>
+            </a:pPr>
+            <a:r>
+              <a:rPr sz="1500">
+                <a:solidFill>
+                  <a:srgbClr val="22282E"/>
+                </a:solidFill>
+              </a:rPr>
+              <a:t>•  Contén. Con Velociraptor, ejecuta un flujo de aislamiento de host de laboratorio y verifica que solo el agente mantiene conectividad.</a:t>
+            </a:r>
+          </a:p>
+          <a:p>
+            <a:pPr>
+              <a:spcAft>
+                <a:spcPts val="600"/>
+              </a:spcAft>
+            </a:pPr>
+            <a:r>
+              <a:rPr sz="1500">
+                <a:solidFill>
+                  <a:srgbClr val="22282E"/>
+                </a:solidFill>
+              </a:rPr>
+              <a:t>•  Recolecta evidencia. Lanza una colección (procesos, autoruns, prefetch) para preservar el estado antes de remediar.</a:t>
             </a:r>
           </a:p>
         </p:txBody>
@@ -3511,7 +3561,7 @@
                   <a:srgbClr val="0B3D2E"/>
                 </a:solidFill>
               </a:rPr>
-              <a:t>🔗 Referencias</a:t>
+              <a:t>✍️ Ejercicios</a:t>
             </a:r>
           </a:p>
         </p:txBody>
@@ -3549,6 +3599,602 @@
                   <a:srgbClr val="22282E"/>
                 </a:solidFill>
               </a:rPr>
+              <a:t>•  Escribe 3 consultas osquery para hunting (procesos sin firma, autoruns, usuarios).</a:t>
+            </a:r>
+          </a:p>
+          <a:p>
+            <a:pPr>
+              <a:spcAft>
+                <a:spcPts val="600"/>
+              </a:spcAft>
+            </a:pPr>
+            <a:r>
+              <a:rPr sz="1500">
+                <a:solidFill>
+                  <a:srgbClr val="22282E"/>
+                </a:solidFill>
+              </a:rPr>
+              <a:t>•  Explica la diferencia entre matar un proceso y aislar el host, y cuándo usar cada uno.</a:t>
+            </a:r>
+          </a:p>
+          <a:p>
+            <a:pPr>
+              <a:spcAft>
+                <a:spcPts val="600"/>
+              </a:spcAft>
+            </a:pPr>
+            <a:r>
+              <a:rPr sz="1500">
+                <a:solidFill>
+                  <a:srgbClr val="22282E"/>
+                </a:solidFill>
+              </a:rPr>
+              <a:t>•  Reconstruye un árbol de procesos a partir de eventos Sysmon.</a:t>
+            </a:r>
+          </a:p>
+          <a:p>
+            <a:pPr>
+              <a:spcAft>
+                <a:spcPts val="600"/>
+              </a:spcAft>
+            </a:pPr>
+            <a:r>
+              <a:rPr sz="1500">
+                <a:solidFill>
+                  <a:srgbClr val="22282E"/>
+                </a:solidFill>
+              </a:rPr>
+              <a:t>•  Compara EDR y antivirus con un ejemplo de amenaza que solo uno detecta.</a:t>
+            </a:r>
+          </a:p>
+          <a:p>
+            <a:pPr>
+              <a:spcAft>
+                <a:spcPts val="600"/>
+              </a:spcAft>
+            </a:pPr>
+            <a:r>
+              <a:rPr sz="1500">
+                <a:solidFill>
+                  <a:srgbClr val="22282E"/>
+                </a:solidFill>
+              </a:rPr>
+              <a:t>•  Diseña un artefacto de Velociraptor para listar tareas programadas.</a:t>
+            </a:r>
+          </a:p>
+          <a:p>
+            <a:pPr>
+              <a:spcAft>
+                <a:spcPts val="600"/>
+              </a:spcAft>
+            </a:pPr>
+            <a:r>
+              <a:rPr sz="1500">
+                <a:solidFill>
+                  <a:srgbClr val="22282E"/>
+                </a:solidFill>
+              </a:rPr>
+              <a:t>•  Enumera 3 técnicas de tamper de EDR y una mitigación para cada una.</a:t>
+            </a:r>
+          </a:p>
+        </p:txBody>
+      </p:sp>
+    </p:spTree>
+  </p:cSld>
+  <p:clrMapOvr>
+    <a:masterClrMapping/>
+  </p:clrMapOvr>
+</p:sld>
+</file>
+
+<file path=ppt/slides/slide13.xml><?xml version="1.0" encoding="utf-8"?>
+<p:sld xmlns:a="http://schemas.openxmlformats.org/drawingml/2006/main" xmlns:p="http://schemas.openxmlformats.org/presentationml/2006/main" xmlns:r="http://schemas.openxmlformats.org/officeDocument/2006/relationships">
+  <p:cSld>
+    <p:spTree>
+      <p:nvGrpSpPr>
+        <p:cNvPr id="1" name=""/>
+        <p:cNvGrpSpPr/>
+        <p:nvPr/>
+      </p:nvGrpSpPr>
+      <p:grpSpPr/>
+      <p:sp>
+        <p:nvSpPr>
+          <p:cNvPr id="2" name="TextBox 1"/>
+          <p:cNvSpPr txBox="1"/>
+          <p:nvPr/>
+        </p:nvSpPr>
+        <p:spPr>
+          <a:xfrm>
+            <a:off x="457200" y="320040"/>
+            <a:ext cx="8229600" cy="822960"/>
+          </a:xfrm>
+          <a:prstGeom prst="rect">
+            <a:avLst/>
+          </a:prstGeom>
+          <a:noFill/>
+        </p:spPr>
+        <p:txBody>
+          <a:bodyPr wrap="square">
+            <a:spAutoFit/>
+          </a:bodyPr>
+          <a:lstStyle/>
+          <a:p>
+            <a:r>
+              <a:rPr sz="2600" b="1">
+                <a:solidFill>
+                  <a:srgbClr val="0B3D2E"/>
+                </a:solidFill>
+              </a:rPr>
+              <a:t>📝 Reto verificable</a:t>
+            </a:r>
+          </a:p>
+        </p:txBody>
+      </p:sp>
+      <p:sp>
+        <p:nvSpPr>
+          <p:cNvPr id="3" name="TextBox 2"/>
+          <p:cNvSpPr txBox="1"/>
+          <p:nvPr/>
+        </p:nvSpPr>
+        <p:spPr>
+          <a:xfrm>
+            <a:off x="457200" y="1280160"/>
+            <a:ext cx="8229600" cy="4937760"/>
+          </a:xfrm>
+          <a:prstGeom prst="rect">
+            <a:avLst/>
+          </a:prstGeom>
+          <a:noFill/>
+        </p:spPr>
+        <p:txBody>
+          <a:bodyPr wrap="square">
+            <a:spAutoFit/>
+          </a:bodyPr>
+          <a:lstStyle/>
+          <a:p>
+            <a:pPr>
+              <a:spcAft>
+                <a:spcPts val="600"/>
+              </a:spcAft>
+            </a:pPr>
+            <a:r>
+              <a:rPr sz="1500">
+                <a:solidFill>
+                  <a:srgbClr val="22282E"/>
+                </a:solidFill>
+              </a:rPr>
+              <a:t>•  Investiga una actividad sospechosa simulada en tu endpoint de laboratorio y entrega: árbol de procesos, línea de tiempo, evidencia recolectada y la acción de contención aplicada. Criterio de…</a:t>
+            </a:r>
+          </a:p>
+        </p:txBody>
+      </p:sp>
+    </p:spTree>
+  </p:cSld>
+  <p:clrMapOvr>
+    <a:masterClrMapping/>
+  </p:clrMapOvr>
+</p:sld>
+</file>
+
+<file path=ppt/slides/slide14.xml><?xml version="1.0" encoding="utf-8"?>
+<p:sld xmlns:a="http://schemas.openxmlformats.org/drawingml/2006/main" xmlns:p="http://schemas.openxmlformats.org/presentationml/2006/main" xmlns:r="http://schemas.openxmlformats.org/officeDocument/2006/relationships">
+  <p:cSld>
+    <p:spTree>
+      <p:nvGrpSpPr>
+        <p:cNvPr id="1" name=""/>
+        <p:cNvGrpSpPr/>
+        <p:nvPr/>
+      </p:nvGrpSpPr>
+      <p:grpSpPr/>
+      <p:sp>
+        <p:nvSpPr>
+          <p:cNvPr id="2" name="TextBox 1"/>
+          <p:cNvSpPr txBox="1"/>
+          <p:nvPr/>
+        </p:nvSpPr>
+        <p:spPr>
+          <a:xfrm>
+            <a:off x="457200" y="320040"/>
+            <a:ext cx="8229600" cy="822960"/>
+          </a:xfrm>
+          <a:prstGeom prst="rect">
+            <a:avLst/>
+          </a:prstGeom>
+          <a:noFill/>
+        </p:spPr>
+        <p:txBody>
+          <a:bodyPr wrap="square">
+            <a:spAutoFit/>
+          </a:bodyPr>
+          <a:lstStyle/>
+          <a:p>
+            <a:r>
+              <a:rPr sz="2600" b="1">
+                <a:solidFill>
+                  <a:srgbClr val="0B3D2E"/>
+                </a:solidFill>
+              </a:rPr>
+              <a:t>⚠️ Errores comunes</a:t>
+            </a:r>
+          </a:p>
+        </p:txBody>
+      </p:sp>
+      <p:sp>
+        <p:nvSpPr>
+          <p:cNvPr id="3" name="TextBox 2"/>
+          <p:cNvSpPr txBox="1"/>
+          <p:nvPr/>
+        </p:nvSpPr>
+        <p:spPr>
+          <a:xfrm>
+            <a:off x="457200" y="1280160"/>
+            <a:ext cx="8229600" cy="4937760"/>
+          </a:xfrm>
+          <a:prstGeom prst="rect">
+            <a:avLst/>
+          </a:prstGeom>
+          <a:noFill/>
+        </p:spPr>
+        <p:txBody>
+          <a:bodyPr wrap="square">
+            <a:spAutoFit/>
+          </a:bodyPr>
+          <a:lstStyle/>
+          <a:p>
+            <a:pPr>
+              <a:spcAft>
+                <a:spcPts val="600"/>
+              </a:spcAft>
+            </a:pPr>
+            <a:r>
+              <a:rPr sz="1500">
+                <a:solidFill>
+                  <a:srgbClr val="22282E"/>
+                </a:solidFill>
+              </a:rPr>
+              <a:t>•  Matas el proceso y pierdes evidencia — Recolecta antes de responder; aísla en vez de apagar</a:t>
+            </a:r>
+          </a:p>
+          <a:p>
+            <a:pPr>
+              <a:spcAft>
+                <a:spcPts val="600"/>
+              </a:spcAft>
+            </a:pPr>
+            <a:r>
+              <a:rPr sz="1500">
+                <a:solidFill>
+                  <a:srgbClr val="22282E"/>
+                </a:solidFill>
+              </a:rPr>
+              <a:t>•  El EDR no ve el ataque — Telemetría insuficiente o exclusiones amplias; revisa cobertura</a:t>
+            </a:r>
+          </a:p>
+          <a:p>
+            <a:pPr>
+              <a:spcAft>
+                <a:spcPts val="600"/>
+              </a:spcAft>
+            </a:pPr>
+            <a:r>
+              <a:rPr sz="1500">
+                <a:solidFill>
+                  <a:srgbClr val="22282E"/>
+                </a:solidFill>
+              </a:rPr>
+              <a:t>•  osquery devuelve vacío — Tabla equivocada o permisos; verifica con .tables y privilegios</a:t>
+            </a:r>
+          </a:p>
+          <a:p>
+            <a:pPr>
+              <a:spcAft>
+                <a:spcPts val="600"/>
+              </a:spcAft>
+            </a:pPr>
+            <a:r>
+              <a:rPr sz="1500">
+                <a:solidFill>
+                  <a:srgbClr val="22282E"/>
+                </a:solidFill>
+              </a:rPr>
+              <a:t>•  Host aislado sin poder investigar — Regla de aislamiento bloqueó también al agente; ajusta la política</a:t>
+            </a:r>
+          </a:p>
+          <a:p>
+            <a:pPr>
+              <a:spcAft>
+                <a:spcPts val="600"/>
+              </a:spcAft>
+            </a:pPr>
+            <a:r>
+              <a:rPr sz="1500">
+                <a:solidFill>
+                  <a:srgbClr val="22282E"/>
+                </a:solidFill>
+              </a:rPr>
+              <a:t>•  Alertas EDR sin contexto de linaje — Falta correlación padre-hijo; habilita registro de línea de comandos</a:t>
+            </a:r>
+          </a:p>
+        </p:txBody>
+      </p:sp>
+    </p:spTree>
+  </p:cSld>
+  <p:clrMapOvr>
+    <a:masterClrMapping/>
+  </p:clrMapOvr>
+</p:sld>
+</file>
+
+<file path=ppt/slides/slide15.xml><?xml version="1.0" encoding="utf-8"?>
+<p:sld xmlns:a="http://schemas.openxmlformats.org/drawingml/2006/main" xmlns:p="http://schemas.openxmlformats.org/presentationml/2006/main" xmlns:r="http://schemas.openxmlformats.org/officeDocument/2006/relationships">
+  <p:cSld>
+    <p:spTree>
+      <p:nvGrpSpPr>
+        <p:cNvPr id="1" name=""/>
+        <p:cNvGrpSpPr/>
+        <p:nvPr/>
+      </p:nvGrpSpPr>
+      <p:grpSpPr/>
+      <p:sp>
+        <p:nvSpPr>
+          <p:cNvPr id="2" name="TextBox 1"/>
+          <p:cNvSpPr txBox="1"/>
+          <p:nvPr/>
+        </p:nvSpPr>
+        <p:spPr>
+          <a:xfrm>
+            <a:off x="457200" y="320040"/>
+            <a:ext cx="8229600" cy="822960"/>
+          </a:xfrm>
+          <a:prstGeom prst="rect">
+            <a:avLst/>
+          </a:prstGeom>
+          <a:noFill/>
+        </p:spPr>
+        <p:txBody>
+          <a:bodyPr wrap="square">
+            <a:spAutoFit/>
+          </a:bodyPr>
+          <a:lstStyle/>
+          <a:p>
+            <a:r>
+              <a:rPr sz="2600" b="1">
+                <a:solidFill>
+                  <a:srgbClr val="0B3D2E"/>
+                </a:solidFill>
+              </a:rPr>
+              <a:t>❓ Preguntas frecuentes</a:t>
+            </a:r>
+          </a:p>
+        </p:txBody>
+      </p:sp>
+      <p:sp>
+        <p:nvSpPr>
+          <p:cNvPr id="3" name="TextBox 2"/>
+          <p:cNvSpPr txBox="1"/>
+          <p:nvPr/>
+        </p:nvSpPr>
+        <p:spPr>
+          <a:xfrm>
+            <a:off x="457200" y="1280160"/>
+            <a:ext cx="8229600" cy="4937760"/>
+          </a:xfrm>
+          <a:prstGeom prst="rect">
+            <a:avLst/>
+          </a:prstGeom>
+          <a:noFill/>
+        </p:spPr>
+        <p:txBody>
+          <a:bodyPr wrap="square">
+            <a:spAutoFit/>
+          </a:bodyPr>
+          <a:lstStyle/>
+          <a:p>
+            <a:pPr>
+              <a:spcAft>
+                <a:spcPts val="600"/>
+              </a:spcAft>
+            </a:pPr>
+            <a:r>
+              <a:rPr sz="1500">
+                <a:solidFill>
+                  <a:srgbClr val="22282E"/>
+                </a:solidFill>
+              </a:rPr>
+              <a:t>•  ❓ ¿EDR o antivirus?</a:t>
+            </a:r>
+          </a:p>
+          <a:p>
+            <a:pPr>
+              <a:spcAft>
+                <a:spcPts val="600"/>
+              </a:spcAft>
+            </a:pPr>
+            <a:r>
+              <a:rPr sz="1500">
+                <a:solidFill>
+                  <a:srgbClr val="22282E"/>
+                </a:solidFill>
+              </a:rPr>
+              <a:t>•  Ambos. El EPP/AV bloquea lo conocido y barato de parar; el EDR detecta comportamiento y permite responder. Se complementan; el AV suele ser una capa del EDR.</a:t>
+            </a:r>
+          </a:p>
+          <a:p>
+            <a:pPr>
+              <a:spcAft>
+                <a:spcPts val="600"/>
+              </a:spcAft>
+            </a:pPr>
+            <a:r>
+              <a:rPr sz="1500">
+                <a:solidFill>
+                  <a:srgbClr val="22282E"/>
+                </a:solidFill>
+              </a:rPr>
+              <a:t>•  ❓ ¿Puedo practicar EDR sin comprar uno?</a:t>
+            </a:r>
+          </a:p>
+          <a:p>
+            <a:pPr>
+              <a:spcAft>
+                <a:spcPts val="600"/>
+              </a:spcAft>
+            </a:pPr>
+            <a:r>
+              <a:rPr sz="1500">
+                <a:solidFill>
+                  <a:srgbClr val="22282E"/>
+                </a:solidFill>
+              </a:rPr>
+              <a:t>•  Sí. Velociraptor, osquery, Wazuh y Sysmon cubren los conceptos clave —telemetría, hunting, colección y respuesta— de forma gratuita y realista.</a:t>
+            </a:r>
+          </a:p>
+          <a:p>
+            <a:pPr>
+              <a:spcAft>
+                <a:spcPts val="600"/>
+              </a:spcAft>
+            </a:pPr>
+            <a:r>
+              <a:rPr sz="1500">
+                <a:solidFill>
+                  <a:srgbClr val="22282E"/>
+                </a:solidFill>
+              </a:rPr>
+              <a:t>•  ❓ ¿El EDR es infalible?</a:t>
+            </a:r>
+          </a:p>
+          <a:p>
+            <a:pPr>
+              <a:spcAft>
+                <a:spcPts val="600"/>
+              </a:spcAft>
+            </a:pPr>
+            <a:r>
+              <a:rPr sz="1500">
+                <a:solidFill>
+                  <a:srgbClr val="22282E"/>
+                </a:solidFill>
+              </a:rPr>
+              <a:t>•  No. Existen técnicas de evasión y tamper. Por eso el blue team combina EDR con telemetría de red, identidad y hunting: defensa en profundidad.</a:t>
+            </a:r>
+          </a:p>
+        </p:txBody>
+      </p:sp>
+    </p:spTree>
+  </p:cSld>
+  <p:clrMapOvr>
+    <a:masterClrMapping/>
+  </p:clrMapOvr>
+</p:sld>
+</file>
+
+<file path=ppt/slides/slide16.xml><?xml version="1.0" encoding="utf-8"?>
+<p:sld xmlns:a="http://schemas.openxmlformats.org/drawingml/2006/main" xmlns:p="http://schemas.openxmlformats.org/presentationml/2006/main" xmlns:r="http://schemas.openxmlformats.org/officeDocument/2006/relationships">
+  <p:cSld>
+    <p:spTree>
+      <p:nvGrpSpPr>
+        <p:cNvPr id="1" name=""/>
+        <p:cNvGrpSpPr/>
+        <p:nvPr/>
+      </p:nvGrpSpPr>
+      <p:grpSpPr/>
+      <p:sp>
+        <p:nvSpPr>
+          <p:cNvPr id="2" name="TextBox 1"/>
+          <p:cNvSpPr txBox="1"/>
+          <p:nvPr/>
+        </p:nvSpPr>
+        <p:spPr>
+          <a:xfrm>
+            <a:off x="457200" y="320040"/>
+            <a:ext cx="8229600" cy="822960"/>
+          </a:xfrm>
+          <a:prstGeom prst="rect">
+            <a:avLst/>
+          </a:prstGeom>
+          <a:noFill/>
+        </p:spPr>
+        <p:txBody>
+          <a:bodyPr wrap="square">
+            <a:spAutoFit/>
+          </a:bodyPr>
+          <a:lstStyle/>
+          <a:p>
+            <a:r>
+              <a:rPr sz="2600" b="1">
+                <a:solidFill>
+                  <a:srgbClr val="0B3D2E"/>
+                </a:solidFill>
+              </a:rPr>
+              <a:t>🔗 Referencias verificables y alcance</a:t>
+            </a:r>
+          </a:p>
+        </p:txBody>
+      </p:sp>
+      <p:sp>
+        <p:nvSpPr>
+          <p:cNvPr id="3" name="TextBox 2"/>
+          <p:cNvSpPr txBox="1"/>
+          <p:nvPr/>
+        </p:nvSpPr>
+        <p:spPr>
+          <a:xfrm>
+            <a:off x="457200" y="1280160"/>
+            <a:ext cx="8229600" cy="4937760"/>
+          </a:xfrm>
+          <a:prstGeom prst="rect">
+            <a:avLst/>
+          </a:prstGeom>
+          <a:noFill/>
+        </p:spPr>
+        <p:txBody>
+          <a:bodyPr wrap="square">
+            <a:spAutoFit/>
+          </a:bodyPr>
+          <a:lstStyle/>
+          <a:p>
+            <a:pPr>
+              <a:spcAft>
+                <a:spcPts val="600"/>
+              </a:spcAft>
+            </a:pPr>
+            <a:r>
+              <a:rPr sz="1500">
+                <a:solidFill>
+                  <a:srgbClr val="22282E"/>
+                </a:solidFill>
+              </a:rPr>
+              <a:t>•  🏢 En la empresa: EDR/XDR comerciales como CrowdStrike Falcon, Microsoft Defender for Endpoint, SentinelOne o Elastic Security — el análisis de endpoint es transferible entre productos.</a:t>
+            </a:r>
+          </a:p>
+          <a:p>
+            <a:pPr>
+              <a:spcAft>
+                <a:spcPts val="600"/>
+              </a:spcAft>
+            </a:pPr>
+            <a:r>
+              <a:rPr sz="1500">
+                <a:solidFill>
+                  <a:srgbClr val="22282E"/>
+                </a:solidFill>
+              </a:rPr>
+              <a:t>•  🛠️ RootCause Windows Inspector (Apache-2.0) — sensor forense de comportamiento para Windows · lab: labs/rootcause-windows.</a:t>
+            </a:r>
+          </a:p>
+          <a:p>
+            <a:pPr>
+              <a:spcAft>
+                <a:spcPts val="600"/>
+              </a:spcAft>
+            </a:pPr>
+            <a:r>
+              <a:rPr sz="1500">
+                <a:solidFill>
+                  <a:srgbClr val="22282E"/>
+                </a:solidFill>
+              </a:rPr>
               <a:t>•  Murdoch, D. Blue Team Handbook: SOC, SIEM, and Threat Hunting Use Cases.</a:t>
             </a:r>
           </a:p>
@@ -3564,56 +4210,131 @@
                   <a:srgbClr val="22282E"/>
                 </a:solidFill>
               </a:rPr>
-              <a:t>•  Velociraptor Documentation — &lt;https://docs.velociraptor.app/&gt;</a:t>
-            </a:r>
-          </a:p>
-          <a:p>
-            <a:pPr>
-              <a:spcAft>
-                <a:spcPts val="600"/>
-              </a:spcAft>
-            </a:pPr>
-            <a:r>
-              <a:rPr sz="1500">
-                <a:solidFill>
-                  <a:srgbClr val="22282E"/>
-                </a:solidFill>
-              </a:rPr>
-              <a:t>•  osquery Documentation — &lt;https://osquery.readthedocs.io/&gt;</a:t>
-            </a:r>
-          </a:p>
-          <a:p>
-            <a:pPr>
-              <a:spcAft>
-                <a:spcPts val="600"/>
-              </a:spcAft>
-            </a:pPr>
-            <a:r>
-              <a:rPr sz="1500">
-                <a:solidFill>
-                  <a:srgbClr val="22282E"/>
-                </a:solidFill>
-              </a:rPr>
-              <a:t>•  MITRE ATT&amp;CK, táctica Defense Evasion — &lt;https://attack.mitre.org/tactics/TA0005/&gt;</a:t>
-            </a:r>
-          </a:p>
-          <a:p>
-            <a:pPr>
-              <a:spcAft>
-                <a:spcPts val="600"/>
-              </a:spcAft>
-            </a:pPr>
-            <a:r>
-              <a:rPr sz="1500">
-                <a:solidFill>
-                  <a:srgbClr val="22282E"/>
-                </a:solidFill>
-              </a:rPr>
-              <a:t>•  Wazuh Endpoint Security — &lt;https://documentation.wazuh.com/&gt;</a:t>
-            </a:r>
-          </a:p>
-        </p:txBody>
-      </p:sp>
+              <a:t>•  Velociraptor: documentación oficial de VQL, artefactos, colecciones y respuesta remota; su presencia no garantiza retención histórica de cada evento — &lt;https://docs.velociraptor.app/&gt;</a:t>
+            </a:r>
+          </a:p>
+          <a:p>
+            <a:pPr>
+              <a:spcAft>
+                <a:spcPts val="600"/>
+              </a:spcAft>
+            </a:pPr>
+            <a:r>
+              <a:rPr sz="1500">
+                <a:solidFill>
+                  <a:srgbClr val="22282E"/>
+                </a:solidFill>
+              </a:rPr>
+              <a:t>•  osquery: documentación oficial de tablas y consultas; muchas tablas describen estado al momento de consultar, no una secuencia histórica — &lt;https://osquery.readthedocs.io/&gt;</a:t>
+            </a:r>
+          </a:p>
+          <a:p>
+            <a:pPr>
+              <a:spcAft>
+                <a:spcPts val="600"/>
+              </a:spcAft>
+            </a:pPr>
+            <a:r>
+              <a:rPr sz="1500">
+                <a:solidFill>
+                  <a:srgbClr val="22282E"/>
+                </a:solidFill>
+              </a:rPr>
+              <a:t>•  Microsoft Defender for Endpoint: documentación oficial del flujo de investigación de dispositivos usada como ejemplo de EDR comercial —…</a:t>
+            </a:r>
+          </a:p>
+          <a:p>
+            <a:pPr>
+              <a:spcAft>
+                <a:spcPts val="600"/>
+              </a:spcAft>
+            </a:pPr>
+            <a:r>
+              <a:rPr sz="1500">
+                <a:solidFill>
+                  <a:srgbClr val="22282E"/>
+                </a:solidFill>
+              </a:rPr>
+              <a:t>•  MITRE ATT&amp;CK, Defense Evasion: fuente primaria de comportamientos que pueden intentar reducir visibilidad o eludir controles — &lt;https://attack.mitre.org/tactics/TA0005/&gt;</a:t>
+            </a:r>
+          </a:p>
+        </p:txBody>
+      </p:sp>
+    </p:spTree>
+  </p:cSld>
+  <p:clrMapOvr>
+    <a:masterClrMapping/>
+  </p:clrMapOvr>
+</p:sld>
+</file>
+
+<file path=ppt/slides/slide17.xml><?xml version="1.0" encoding="utf-8"?>
+<p:sld xmlns:a="http://schemas.openxmlformats.org/drawingml/2006/main" xmlns:p="http://schemas.openxmlformats.org/presentationml/2006/main" xmlns:r="http://schemas.openxmlformats.org/officeDocument/2006/relationships">
+  <p:cSld>
+    <p:spTree>
+      <p:nvGrpSpPr>
+        <p:cNvPr id="1" name=""/>
+        <p:cNvGrpSpPr/>
+        <p:nvPr/>
+      </p:nvGrpSpPr>
+      <p:grpSpPr/>
+      <p:sp>
+        <p:nvSpPr>
+          <p:cNvPr id="2" name="TextBox 1"/>
+          <p:cNvSpPr txBox="1"/>
+          <p:nvPr/>
+        </p:nvSpPr>
+        <p:spPr>
+          <a:xfrm>
+            <a:off x="457200" y="274320"/>
+            <a:ext cx="8229600" cy="640080"/>
+          </a:xfrm>
+          <a:prstGeom prst="rect">
+            <a:avLst/>
+          </a:prstGeom>
+          <a:noFill/>
+        </p:spPr>
+        <p:txBody>
+          <a:bodyPr wrap="square">
+            <a:spAutoFit/>
+          </a:bodyPr>
+          <a:lstStyle/>
+          <a:p>
+            <a:r>
+              <a:rPr sz="2200" b="1">
+                <a:solidFill>
+                  <a:srgbClr val="0B3D2E"/>
+                </a:solidFill>
+              </a:rPr>
+              <a:t>Diagrama de la clase</a:t>
+            </a:r>
+          </a:p>
+        </p:txBody>
+      </p:sp>
+      <p:pic>
+        <p:nvPicPr>
+          <p:cNvPr id="3" name="Picture 2" descr="d159138f0fc61577.png"/>
+          <p:cNvPicPr>
+            <a:picLocks noChangeAspect="1"/>
+          </p:cNvPicPr>
+          <p:nvPr/>
+        </p:nvPicPr>
+        <p:blipFill>
+          <a:blip r:embed="rId2"/>
+          <a:stretch>
+            <a:fillRect/>
+          </a:stretch>
+        </p:blipFill>
+        <p:spPr>
+          <a:xfrm>
+            <a:off x="457200" y="3186684"/>
+            <a:ext cx="8229600" cy="1124712"/>
+          </a:xfrm>
+          <a:prstGeom prst="rect">
+            <a:avLst/>
+          </a:prstGeom>
+        </p:spPr>
+      </p:pic>
     </p:spTree>
   </p:cSld>
   <p:clrMapOvr>
@@ -3698,7 +4419,7 @@
                   <a:srgbClr val="22282E"/>
                 </a:solidFill>
               </a:rPr>
-              <a:t>•  Entender qué es un EDR (Endpoint Detection and Response), qué telemetría produce, cómo se investiga una alerta de endpoint y cómo se contiene un host. Trabajarás con conceptos y herramientas abiertas equivalentes (Velociraptor, Wazuh, osquery) para practicar sin depender de un producto comercial, y sabrás leer un árbol de procesos y una línea de tiempo de actividad.</a:t>
+              <a:t>•  Entender qué es un EDR (Endpoint Detection and Response), qué telemetría produce, cómo se investiga una alerta de endpoint y cómo se contiene un host. Trabajarás con conceptos y herramientas abiertas…</a:t>
             </a:r>
           </a:p>
         </p:txBody>
@@ -4092,7 +4813,7 @@
                   <a:srgbClr val="0B3D2E"/>
                 </a:solidFill>
               </a:rPr>
-              <a:t>📖 Definiciones y características</a:t>
+              <a:t>🧠 Explicación en profundidad</a:t>
             </a:r>
           </a:p>
         </p:txBody>
@@ -4130,97 +4851,97 @@
                   <a:srgbClr val="22282E"/>
                 </a:solidFill>
               </a:rPr>
-              <a:t>•  EDR: solución que registra actividad de endpoint, detecta comportamientos maliciosos y permite responder remotamente. Característica: telemetría continua + capacidad de acción.</a:t>
-            </a:r>
-          </a:p>
-          <a:p>
-            <a:pPr>
-              <a:spcAft>
-                <a:spcPts val="600"/>
-              </a:spcAft>
-            </a:pPr>
-            <a:r>
-              <a:rPr sz="1500">
-                <a:solidFill>
-                  <a:srgbClr val="22282E"/>
-                </a:solidFill>
-              </a:rPr>
-              <a:t>•  EPP (Endpoint Protection Platform): antivirus/antimalware de prevención. Característica: bloquea conocido; el EDR detecta lo desconocido por comportamiento.</a:t>
-            </a:r>
-          </a:p>
-          <a:p>
-            <a:pPr>
-              <a:spcAft>
-                <a:spcPts val="600"/>
-              </a:spcAft>
-            </a:pPr>
-            <a:r>
-              <a:rPr sz="1500">
-                <a:solidFill>
-                  <a:srgbClr val="22282E"/>
-                </a:solidFill>
-              </a:rPr>
-              <a:t>•  XDR: correlación extendida entre endpoint, red, identidad y nube. Característica: unifica señales que un EDR aislado no ve.</a:t>
-            </a:r>
-          </a:p>
-          <a:p>
-            <a:pPr>
-              <a:spcAft>
-                <a:spcPts val="600"/>
-              </a:spcAft>
-            </a:pPr>
-            <a:r>
-              <a:rPr sz="1500">
-                <a:solidFill>
-                  <a:srgbClr val="22282E"/>
-                </a:solidFill>
-              </a:rPr>
-              <a:t>•  Árbol de procesos: relación padre-hijo de procesos con sus argumentos. Característica: revela el linaje de una ejecución sospechosa.</a:t>
-            </a:r>
-          </a:p>
-          <a:p>
-            <a:pPr>
-              <a:spcAft>
-                <a:spcPts val="600"/>
-              </a:spcAft>
-            </a:pPr>
-            <a:r>
-              <a:rPr sz="1500">
-                <a:solidFill>
-                  <a:srgbClr val="22282E"/>
-                </a:solidFill>
-              </a:rPr>
-              <a:t>•  osquery: expone el SO como tablas SQL consultables. Característica: hunting e inventario en lenguaje familiar.</a:t>
-            </a:r>
-          </a:p>
-          <a:p>
-            <a:pPr>
-              <a:spcAft>
-                <a:spcPts val="600"/>
-              </a:spcAft>
-            </a:pPr>
-            <a:r>
-              <a:rPr sz="1500">
-                <a:solidFill>
-                  <a:srgbClr val="22282E"/>
-                </a:solidFill>
-              </a:rPr>
-              <a:t>•  Velociraptor: plataforma DFIR/hunting con su lenguaje VQL. Característica: recolección forense y caza a escala de flota.</a:t>
-            </a:r>
-          </a:p>
-          <a:p>
-            <a:pPr>
-              <a:spcAft>
-                <a:spcPts val="600"/>
-              </a:spcAft>
-            </a:pPr>
-            <a:r>
-              <a:rPr sz="1500">
-                <a:solidFill>
-                  <a:srgbClr val="22282E"/>
-                </a:solidFill>
-              </a:rPr>
-              <a:t>•  Aislamiento de host: desconecta el endpoint de la red salvo del EDR. Característica: contiene sin apagar, preservando evidencia.</a:t>
+              <a:t>•  EDR conserva relaciones entre usuario, proceso padre, proceso hijo, archivo, registro y conexión. El valor está en el linaje, no en un nombre aislado: un intérprete puede ser legítimo, pero su padre…</a:t>
+            </a:r>
+          </a:p>
+          <a:p>
+            <a:pPr>
+              <a:spcAft>
+                <a:spcPts val="600"/>
+              </a:spcAft>
+            </a:pPr>
+            <a:r>
+              <a:rPr sz="1500">
+                <a:solidFill>
+                  <a:srgbClr val="22282E"/>
+                </a:solidFill>
+              </a:rPr>
+              <a:t>•  PID y nombre no identifican permanentemente una ejecución: el PID se reutiliza. GUID y tiempo de creación permiten correlacionar mejor; hash y firma aportan contexto, pero tampoco deciden por sí…</a:t>
+            </a:r>
+          </a:p>
+          <a:p>
+            <a:pPr>
+              <a:spcAft>
+                <a:spcPts val="600"/>
+              </a:spcAft>
+            </a:pPr>
+            <a:r>
+              <a:rPr sz="1500">
+                <a:solidFill>
+                  <a:srgbClr val="22282E"/>
+                </a:solidFill>
+              </a:rPr>
+              <a:t>•  Ante rundll32.exe, el nombre no decide. Se localiza la instancia por GUID y tiempo, se examinan padre, línea de comandos, DLL y export, y se siguen archivos, hijos y conexiones. Después se compara…</a:t>
+            </a:r>
+          </a:p>
+          <a:p>
+            <a:pPr>
+              <a:spcAft>
+                <a:spcPts val="600"/>
+              </a:spcAft>
+            </a:pPr>
+            <a:r>
+              <a:rPr sz="1500">
+                <a:solidFill>
+                  <a:srgbClr val="22282E"/>
+                </a:solidFill>
+              </a:rPr>
+              <a:t>•  El árbol puede ser incompleto porque el sensor empezó tarde, perdió eventos o no observa igual procesos protegidos. Se contrasta con Event Logs, filesystem y red. Si un proceso terminó, una consulta…</a:t>
+            </a:r>
+          </a:p>
+          <a:p>
+            <a:pPr>
+              <a:spcAft>
+                <a:spcPts val="600"/>
+              </a:spcAft>
+            </a:pPr>
+            <a:r>
+              <a:rPr sz="1500">
+                <a:solidFill>
+                  <a:srgbClr val="22282E"/>
+                </a:solidFill>
+              </a:rPr>
+              <a:t>•  Una investigación pivota en dos direcciones. Hacia atrás pregunta cómo apareció el proceso: documento, servicio, tarea, usuario o descarga. Hacia adelante pregunta qué modificó, con quién habló y si…</a:t>
+            </a:r>
+          </a:p>
+          <a:p>
+            <a:pPr>
+              <a:spcAft>
+                <a:spcPts val="600"/>
+              </a:spcAft>
+            </a:pPr>
+            <a:r>
+              <a:rPr sz="1500">
+                <a:solidFill>
+                  <a:srgbClr val="22282E"/>
+                </a:solidFill>
+              </a:rPr>
+              <a:t>•  Aislamiento, cuarentena y terminación tienen efectos diferentes. En una estación, aislar pronto puede ser razonable; en un servidor crítico puede interrumpir servicio y cortar la única visibilidad.…</a:t>
+            </a:r>
+          </a:p>
+          <a:p>
+            <a:pPr>
+              <a:spcAft>
+                <a:spcPts val="600"/>
+              </a:spcAft>
+            </a:pPr>
+            <a:r>
+              <a:rPr sz="1500">
+                <a:solidFill>
+                  <a:srgbClr val="22282E"/>
+                </a:solidFill>
+              </a:rPr>
+              <a:t>•  EPP agrupa capacidades preventivas en endpoint, como antimalware y control de ejecución. EDR prioriza telemetría, investigación y respuesta en endpoints. XDR es una categoría de producto que…</a:t>
             </a:r>
           </a:p>
         </p:txBody>
@@ -4271,7 +4992,7 @@
                   <a:srgbClr val="0B3D2E"/>
                 </a:solidFill>
               </a:rPr>
-              <a:t>🧰 Herramientas y preparación</a:t>
+              <a:t>📔 Glosario</a:t>
             </a:r>
           </a:p>
         </p:txBody>
@@ -4309,97 +5030,97 @@
                   <a:srgbClr val="22282E"/>
                 </a:solidFill>
               </a:rPr>
-              <a:t>•  En laboratorio aislado:</a:t>
-            </a:r>
-          </a:p>
-          <a:p>
-            <a:pPr>
-              <a:spcAft>
-                <a:spcPts val="600"/>
-              </a:spcAft>
-            </a:pPr>
-            <a:r>
-              <a:rPr sz="1500">
-                <a:solidFill>
-                  <a:srgbClr val="22282E"/>
-                </a:solidFill>
-              </a:rPr>
-              <a:t>•  osquery en Windows/Linux para consultas de estado.</a:t>
-            </a:r>
-          </a:p>
-          <a:p>
-            <a:pPr>
-              <a:spcAft>
-                <a:spcPts val="600"/>
-              </a:spcAft>
-            </a:pPr>
-            <a:r>
-              <a:rPr sz="1500">
-                <a:solidFill>
-                  <a:srgbClr val="22282E"/>
-                </a:solidFill>
-              </a:rPr>
-              <a:t>•  Velociraptor (servidor + cliente) para hunting y colección.</a:t>
-            </a:r>
-          </a:p>
-          <a:p>
-            <a:pPr>
-              <a:spcAft>
-                <a:spcPts val="600"/>
-              </a:spcAft>
-            </a:pPr>
-            <a:r>
-              <a:rPr sz="1500">
-                <a:solidFill>
-                  <a:srgbClr val="22282E"/>
-                </a:solidFill>
-              </a:rPr>
-              <a:t>•  Wazuh (clase 185) como capa de detección de endpoint gratuita.</a:t>
-            </a:r>
-          </a:p>
-          <a:p>
-            <a:pPr>
-              <a:spcAft>
-                <a:spcPts val="600"/>
-              </a:spcAft>
-            </a:pPr>
-            <a:r>
-              <a:rPr sz="1500">
-                <a:solidFill>
-                  <a:srgbClr val="22282E"/>
-                </a:solidFill>
-              </a:rPr>
-              <a:t>•  Sysmon como fuente de telemetría rica.</a:t>
-            </a:r>
-          </a:p>
-          <a:p>
-            <a:pPr>
-              <a:spcAft>
-                <a:spcPts val="600"/>
-              </a:spcAft>
-            </a:pPr>
-            <a:r>
-              <a:rPr sz="1500">
-                <a:solidFill>
-                  <a:srgbClr val="22282E"/>
-                </a:solidFill>
-              </a:rPr>
-              <a:t>•  Opcional: prueba de un EDR comercial en su edición de evaluación.</a:t>
-            </a:r>
-          </a:p>
-          <a:p>
-            <a:pPr>
-              <a:spcAft>
-                <a:spcPts val="600"/>
-              </a:spcAft>
-            </a:pPr>
-            <a:r>
-              <a:rPr sz="1500">
-                <a:solidFill>
-                  <a:srgbClr val="22282E"/>
-                </a:solidFill>
-              </a:rPr>
-              <a:t>•  Las acciones de respuesta (aislar, matar procesos) se practican solo sobre tus propias máquinas de laboratorio.</a:t>
+              <a:t>•  EDR: detección y respuesta con telemetría de endpoint.</a:t>
+            </a:r>
+          </a:p>
+          <a:p>
+            <a:pPr>
+              <a:spcAft>
+                <a:spcPts val="600"/>
+              </a:spcAft>
+            </a:pPr>
+            <a:r>
+              <a:rPr sz="1500">
+                <a:solidFill>
+                  <a:srgbClr val="22282E"/>
+                </a:solidFill>
+              </a:rPr>
+              <a:t>•  EPP: prevención en endpoint.</a:t>
+            </a:r>
+          </a:p>
+          <a:p>
+            <a:pPr>
+              <a:spcAft>
+                <a:spcPts val="600"/>
+              </a:spcAft>
+            </a:pPr>
+            <a:r>
+              <a:rPr sz="1500">
+                <a:solidFill>
+                  <a:srgbClr val="22282E"/>
+                </a:solidFill>
+              </a:rPr>
+              <a:t>•  Árbol de procesos: relaciones padre-hijo entre ejecuciones.</a:t>
+            </a:r>
+          </a:p>
+          <a:p>
+            <a:pPr>
+              <a:spcAft>
+                <a:spcPts val="600"/>
+              </a:spcAft>
+            </a:pPr>
+            <a:r>
+              <a:rPr sz="1500">
+                <a:solidFill>
+                  <a:srgbClr val="22282E"/>
+                </a:solidFill>
+              </a:rPr>
+              <a:t>•  Process GUID: identificador de instancia de proceso.</a:t>
+            </a:r>
+          </a:p>
+          <a:p>
+            <a:pPr>
+              <a:spcAft>
+                <a:spcPts val="600"/>
+              </a:spcAft>
+            </a:pPr>
+            <a:r>
+              <a:rPr sz="1500">
+                <a:solidFill>
+                  <a:srgbClr val="22282E"/>
+                </a:solidFill>
+              </a:rPr>
+              <a:t>•  Live response: sesión remota controlada.</a:t>
+            </a:r>
+          </a:p>
+          <a:p>
+            <a:pPr>
+              <a:spcAft>
+                <a:spcPts val="600"/>
+              </a:spcAft>
+            </a:pPr>
+            <a:r>
+              <a:rPr sz="1500">
+                <a:solidFill>
+                  <a:srgbClr val="22282E"/>
+                </a:solidFill>
+              </a:rPr>
+              <a:t>•  Aislamiento: restricción de red del host.</a:t>
+            </a:r>
+          </a:p>
+          <a:p>
+            <a:pPr>
+              <a:spcAft>
+                <a:spcPts val="600"/>
+              </a:spcAft>
+            </a:pPr>
+            <a:r>
+              <a:rPr sz="1500">
+                <a:solidFill>
+                  <a:srgbClr val="22282E"/>
+                </a:solidFill>
+              </a:rPr>
+              <a:t>•  Adquisición: recolección preservada de evidencia.</a:t>
             </a:r>
           </a:p>
         </p:txBody>
@@ -4450,7 +5171,7 @@
                   <a:srgbClr val="0B3D2E"/>
                 </a:solidFill>
               </a:rPr>
-              <a:t>🧪 Laboratorio guiado — Investiga y contén un endpoint</a:t>
+              <a:t>📖 Definiciones y características</a:t>
             </a:r>
           </a:p>
         </p:txBody>
@@ -4488,97 +5209,97 @@
                   <a:srgbClr val="22282E"/>
                 </a:solidFill>
               </a:rPr>
-              <a:t>•  Instala la telemetría. Sysmon + agente Velociraptor + osquery en el Windows de laboratorio.</a:t>
-            </a:r>
-          </a:p>
-          <a:p>
-            <a:pPr>
-              <a:spcAft>
-                <a:spcPts val="600"/>
-              </a:spcAft>
-            </a:pPr>
-            <a:r>
-              <a:rPr sz="1500">
-                <a:solidFill>
-                  <a:srgbClr val="22282E"/>
-                </a:solidFill>
-              </a:rPr>
-              <a:t>•  Genera actividad sospechosa. En la VM, simula una cadena benigna-pero-anómala (p. ej. cmd.exe lanzando powershell -enc ... con un script inofensivo).</a:t>
-            </a:r>
-          </a:p>
-          <a:p>
-            <a:pPr>
-              <a:spcAft>
-                <a:spcPts val="600"/>
-              </a:spcAft>
-            </a:pPr>
-            <a:r>
-              <a:rPr sz="1500">
-                <a:solidFill>
-                  <a:srgbClr val="22282E"/>
-                </a:solidFill>
-              </a:rPr>
-              <a:t>•  Reconstruye el árbol. En Velociraptor, ejecuta un artefacto de listado de procesos o consulta la telemetría Sysmon para ver padre→hijo→nieto.</a:t>
-            </a:r>
-          </a:p>
-          <a:p>
-            <a:pPr>
-              <a:spcAft>
-                <a:spcPts val="600"/>
-              </a:spcAft>
-            </a:pPr>
-            <a:r>
-              <a:rPr sz="1500">
-                <a:solidFill>
-                  <a:srgbClr val="22282E"/>
-                </a:solidFill>
-              </a:rPr>
-              <a:t>•  Consulta la flota con osquery. SELECT name, path, parent FROM processes WHERE name='powershell.exe'; y correlaciona con conexiones: tabla processopensockets.</a:t>
-            </a:r>
-          </a:p>
-          <a:p>
-            <a:pPr>
-              <a:spcAft>
-                <a:spcPts val="600"/>
-              </a:spcAft>
-            </a:pPr>
-            <a:r>
-              <a:rPr sz="1500">
-                <a:solidFill>
-                  <a:srgbClr val="22282E"/>
-                </a:solidFill>
-              </a:rPr>
-              <a:t>•  Construye una línea de tiempo. Ordena por time los eventos: creación de proceso, archivo escrito, conexión de red.</a:t>
-            </a:r>
-          </a:p>
-          <a:p>
-            <a:pPr>
-              <a:spcAft>
-                <a:spcPts val="600"/>
-              </a:spcAft>
-            </a:pPr>
-            <a:r>
-              <a:rPr sz="1500">
-                <a:solidFill>
-                  <a:srgbClr val="22282E"/>
-                </a:solidFill>
-              </a:rPr>
-              <a:t>•  Contén. Con Velociraptor, ejecuta un flujo de aislamiento de host de laboratorio y verifica que solo el agente mantiene conectividad.</a:t>
-            </a:r>
-          </a:p>
-          <a:p>
-            <a:pPr>
-              <a:spcAft>
-                <a:spcPts val="600"/>
-              </a:spcAft>
-            </a:pPr>
-            <a:r>
-              <a:rPr sz="1500">
-                <a:solidFill>
-                  <a:srgbClr val="22282E"/>
-                </a:solidFill>
-              </a:rPr>
-              <a:t>•  Recolecta evidencia. Lanza una colección (procesos, autoruns, prefetch) para preservar el estado antes de remediar.</a:t>
+              <a:t>•  EDR: solución que registra actividad de endpoint, detecta comportamientos maliciosos y permite responder remotamente. Característica: telemetría continua + capacidad de acción.</a:t>
+            </a:r>
+          </a:p>
+          <a:p>
+            <a:pPr>
+              <a:spcAft>
+                <a:spcPts val="600"/>
+              </a:spcAft>
+            </a:pPr>
+            <a:r>
+              <a:rPr sz="1500">
+                <a:solidFill>
+                  <a:srgbClr val="22282E"/>
+                </a:solidFill>
+              </a:rPr>
+              <a:t>•  EPP (Endpoint Protection Platform): antivirus/antimalware de prevención. Característica: bloquea conocido; el EDR detecta lo desconocido por comportamiento.</a:t>
+            </a:r>
+          </a:p>
+          <a:p>
+            <a:pPr>
+              <a:spcAft>
+                <a:spcPts val="600"/>
+              </a:spcAft>
+            </a:pPr>
+            <a:r>
+              <a:rPr sz="1500">
+                <a:solidFill>
+                  <a:srgbClr val="22282E"/>
+                </a:solidFill>
+              </a:rPr>
+              <a:t>•  XDR: correlación extendida entre endpoint, red, identidad y nube. Característica: unifica señales que un EDR aislado no ve.</a:t>
+            </a:r>
+          </a:p>
+          <a:p>
+            <a:pPr>
+              <a:spcAft>
+                <a:spcPts val="600"/>
+              </a:spcAft>
+            </a:pPr>
+            <a:r>
+              <a:rPr sz="1500">
+                <a:solidFill>
+                  <a:srgbClr val="22282E"/>
+                </a:solidFill>
+              </a:rPr>
+              <a:t>•  Árbol de procesos: relación padre-hijo de procesos con sus argumentos. Característica: revela el linaje de una ejecución sospechosa.</a:t>
+            </a:r>
+          </a:p>
+          <a:p>
+            <a:pPr>
+              <a:spcAft>
+                <a:spcPts val="600"/>
+              </a:spcAft>
+            </a:pPr>
+            <a:r>
+              <a:rPr sz="1500">
+                <a:solidFill>
+                  <a:srgbClr val="22282E"/>
+                </a:solidFill>
+              </a:rPr>
+              <a:t>•  osquery: expone el SO como tablas SQL consultables. Característica: hunting e inventario en lenguaje familiar.</a:t>
+            </a:r>
+          </a:p>
+          <a:p>
+            <a:pPr>
+              <a:spcAft>
+                <a:spcPts val="600"/>
+              </a:spcAft>
+            </a:pPr>
+            <a:r>
+              <a:rPr sz="1500">
+                <a:solidFill>
+                  <a:srgbClr val="22282E"/>
+                </a:solidFill>
+              </a:rPr>
+              <a:t>•  Velociraptor: plataforma DFIR/hunting con su lenguaje VQL. Característica: recolección forense y caza a escala de flota.</a:t>
+            </a:r>
+          </a:p>
+          <a:p>
+            <a:pPr>
+              <a:spcAft>
+                <a:spcPts val="600"/>
+              </a:spcAft>
+            </a:pPr>
+            <a:r>
+              <a:rPr sz="1500">
+                <a:solidFill>
+                  <a:srgbClr val="22282E"/>
+                </a:solidFill>
+              </a:rPr>
+              <a:t>•  Aislamiento de host: desconecta el endpoint de la red salvo del EDR. Característica: contiene sin apagar, preservando evidencia.</a:t>
             </a:r>
           </a:p>
         </p:txBody>
@@ -4629,7 +5350,7 @@
                   <a:srgbClr val="0B3D2E"/>
                 </a:solidFill>
               </a:rPr>
-              <a:t>✍️ Ejercicios</a:t>
+              <a:t>🔍 Investigación resuelta — `rundll32.exe` con conexión exterior</a:t>
             </a:r>
           </a:p>
         </p:txBody>
@@ -4667,82 +5388,37 @@
                   <a:srgbClr val="22282E"/>
                 </a:solidFill>
               </a:rPr>
-              <a:t>•  Escribe 3 consultas osquery para hunting (procesos sin firma, autoruns, usuarios).</a:t>
-            </a:r>
-          </a:p>
-          <a:p>
-            <a:pPr>
-              <a:spcAft>
-                <a:spcPts val="600"/>
-              </a:spcAft>
-            </a:pPr>
-            <a:r>
-              <a:rPr sz="1500">
-                <a:solidFill>
-                  <a:srgbClr val="22282E"/>
-                </a:solidFill>
-              </a:rPr>
-              <a:t>•  Explica la diferencia entre matar un proceso y aislar el host, y cuándo usar cada uno.</a:t>
-            </a:r>
-          </a:p>
-          <a:p>
-            <a:pPr>
-              <a:spcAft>
-                <a:spcPts val="600"/>
-              </a:spcAft>
-            </a:pPr>
-            <a:r>
-              <a:rPr sz="1500">
-                <a:solidFill>
-                  <a:srgbClr val="22282E"/>
-                </a:solidFill>
-              </a:rPr>
-              <a:t>•  Reconstruye un árbol de procesos a partir de eventos Sysmon.</a:t>
-            </a:r>
-          </a:p>
-          <a:p>
-            <a:pPr>
-              <a:spcAft>
-                <a:spcPts val="600"/>
-              </a:spcAft>
-            </a:pPr>
-            <a:r>
-              <a:rPr sz="1500">
-                <a:solidFill>
-                  <a:srgbClr val="22282E"/>
-                </a:solidFill>
-              </a:rPr>
-              <a:t>•  Compara EDR y antivirus con un ejemplo de amenaza que solo uno detecta.</a:t>
-            </a:r>
-          </a:p>
-          <a:p>
-            <a:pPr>
-              <a:spcAft>
-                <a:spcPts val="600"/>
-              </a:spcAft>
-            </a:pPr>
-            <a:r>
-              <a:rPr sz="1500">
-                <a:solidFill>
-                  <a:srgbClr val="22282E"/>
-                </a:solidFill>
-              </a:rPr>
-              <a:t>•  Diseña un artefacto de Velociraptor para listar tareas programadas.</a:t>
-            </a:r>
-          </a:p>
-          <a:p>
-            <a:pPr>
-              <a:spcAft>
-                <a:spcPts val="600"/>
-              </a:spcAft>
-            </a:pPr>
-            <a:r>
-              <a:rPr sz="1500">
-                <a:solidFill>
-                  <a:srgbClr val="22282E"/>
-                </a:solidFill>
-              </a:rPr>
-              <a:t>•  Enumera 3 técnicas de tamper de EDR y una mitigación para cada una.</a:t>
+              <a:t>•  La alerta señala rundll32.exe, pero el analista localiza su ProcessGuid, no todos los procesos con el mismo nombre. El padre es un binario en el perfil del usuario; la línea de comandos carga una DLL…</a:t>
+            </a:r>
+          </a:p>
+          <a:p>
+            <a:pPr>
+              <a:spcAft>
+                <a:spcPts val="600"/>
+              </a:spcAft>
+            </a:pPr>
+            <a:r>
+              <a:rPr sz="1500">
+                <a:solidFill>
+                  <a:srgbClr val="22282E"/>
+                </a:solidFill>
+              </a:rPr>
+              <a:t>•  Hacia atrás se encuentra un archivo descargado por navegador. Hacia adelante se observan un cambio de Run key y una conexión. Se busca el hash en la flota y también el patrón padre–hijo, porque una…</a:t>
+            </a:r>
+          </a:p>
+          <a:p>
+            <a:pPr>
+              <a:spcAft>
+                <a:spcPts val="600"/>
+              </a:spcAft>
+            </a:pPr>
+            <a:r>
+              <a:rPr sz="1500">
+                <a:solidFill>
+                  <a:srgbClr val="22282E"/>
+                </a:solidFill>
+              </a:rPr>
+              <a:t>•  Antes de aislar, el playbook confirma que es una estación y que la consola EDR mantendrá comunicación. Se captura la evidencia prioritaria, se aísla con autoridad registrada y se verifica el estado.…</a:t>
             </a:r>
           </a:p>
         </p:txBody>
@@ -4793,7 +5469,7 @@
                   <a:srgbClr val="0B3D2E"/>
                 </a:solidFill>
               </a:rPr>
-              <a:t>📝 Reto verificable</a:t>
+              <a:t>✅ Criterio de dominio</a:t>
             </a:r>
           </a:p>
         </p:txBody>
@@ -4831,7 +5507,7 @@
                   <a:srgbClr val="22282E"/>
                 </a:solidFill>
               </a:rPr>
-              <a:t>•  Investiga una actividad sospechosa simulada en tu endpoint de laboratorio y entrega: árbol de procesos, línea de tiempo, evidencia recolectada y la acción de contención aplicada. Criterio de aceptación: reconstruyes correctamente la cadena padre→hijo hasta el proceso sospechoso, muestras al menos una conexión de red asociada, y demuestras que tras el aislamiento el host solo conserva el canal del agente.</a:t>
+              <a:t>•  El alumno reconstruye linaje por instancia, diferencia estado actual de historia, corrobora con otra fuente y justifica respuesta y reversión. Marcar un proceso como malicioso solo por nombre o hash…</a:t>
             </a:r>
           </a:p>
         </p:txBody>
